--- a/宣道詩/(宣道詩1)擁戴為王.pptx
+++ b/宣道詩/(宣道詩1)擁戴為王.pptx
@@ -324,7 +324,7 @@
           <a:p>
             <a:fld id="{8ACD5DE7-6A17-44FC-86F1-EC2EE6B5147A}" type="datetimeFigureOut">
               <a:rPr lang="zh-TW" altLang="en-US" smtClean="0"/>
-              <a:t>2021/8/11</a:t>
+              <a:t>2023/5/9</a:t>
             </a:fld>
             <a:endParaRPr lang="zh-TW" altLang="en-US"/>
           </a:p>
@@ -489,7 +489,7 @@
           <a:p>
             <a:fld id="{8ACD5DE7-6A17-44FC-86F1-EC2EE6B5147A}" type="datetimeFigureOut">
               <a:rPr lang="zh-TW" altLang="en-US" smtClean="0"/>
-              <a:t>2021/8/11</a:t>
+              <a:t>2023/5/9</a:t>
             </a:fld>
             <a:endParaRPr lang="zh-TW" altLang="en-US"/>
           </a:p>
@@ -664,7 +664,7 @@
           <a:p>
             <a:fld id="{8ACD5DE7-6A17-44FC-86F1-EC2EE6B5147A}" type="datetimeFigureOut">
               <a:rPr lang="zh-TW" altLang="en-US" smtClean="0"/>
-              <a:t>2021/8/11</a:t>
+              <a:t>2023/5/9</a:t>
             </a:fld>
             <a:endParaRPr lang="zh-TW" altLang="en-US"/>
           </a:p>
@@ -829,7 +829,7 @@
           <a:p>
             <a:fld id="{8ACD5DE7-6A17-44FC-86F1-EC2EE6B5147A}" type="datetimeFigureOut">
               <a:rPr lang="zh-TW" altLang="en-US" smtClean="0"/>
-              <a:t>2021/8/11</a:t>
+              <a:t>2023/5/9</a:t>
             </a:fld>
             <a:endParaRPr lang="zh-TW" altLang="en-US"/>
           </a:p>
@@ -1070,7 +1070,7 @@
           <a:p>
             <a:fld id="{8ACD5DE7-6A17-44FC-86F1-EC2EE6B5147A}" type="datetimeFigureOut">
               <a:rPr lang="zh-TW" altLang="en-US" smtClean="0"/>
-              <a:t>2021/8/11</a:t>
+              <a:t>2023/5/9</a:t>
             </a:fld>
             <a:endParaRPr lang="zh-TW" altLang="en-US"/>
           </a:p>
@@ -1353,7 +1353,7 @@
           <a:p>
             <a:fld id="{8ACD5DE7-6A17-44FC-86F1-EC2EE6B5147A}" type="datetimeFigureOut">
               <a:rPr lang="zh-TW" altLang="en-US" smtClean="0"/>
-              <a:t>2021/8/11</a:t>
+              <a:t>2023/5/9</a:t>
             </a:fld>
             <a:endParaRPr lang="zh-TW" altLang="en-US"/>
           </a:p>
@@ -1770,7 +1770,7 @@
           <a:p>
             <a:fld id="{8ACD5DE7-6A17-44FC-86F1-EC2EE6B5147A}" type="datetimeFigureOut">
               <a:rPr lang="zh-TW" altLang="en-US" smtClean="0"/>
-              <a:t>2021/8/11</a:t>
+              <a:t>2023/5/9</a:t>
             </a:fld>
             <a:endParaRPr lang="zh-TW" altLang="en-US"/>
           </a:p>
@@ -1883,7 +1883,7 @@
           <a:p>
             <a:fld id="{8ACD5DE7-6A17-44FC-86F1-EC2EE6B5147A}" type="datetimeFigureOut">
               <a:rPr lang="zh-TW" altLang="en-US" smtClean="0"/>
-              <a:t>2021/8/11</a:t>
+              <a:t>2023/5/9</a:t>
             </a:fld>
             <a:endParaRPr lang="zh-TW" altLang="en-US"/>
           </a:p>
@@ -1973,7 +1973,7 @@
           <a:p>
             <a:fld id="{8ACD5DE7-6A17-44FC-86F1-EC2EE6B5147A}" type="datetimeFigureOut">
               <a:rPr lang="zh-TW" altLang="en-US" smtClean="0"/>
-              <a:t>2021/8/11</a:t>
+              <a:t>2023/5/9</a:t>
             </a:fld>
             <a:endParaRPr lang="zh-TW" altLang="en-US"/>
           </a:p>
@@ -2245,7 +2245,7 @@
           <a:p>
             <a:fld id="{8ACD5DE7-6A17-44FC-86F1-EC2EE6B5147A}" type="datetimeFigureOut">
               <a:rPr lang="zh-TW" altLang="en-US" smtClean="0"/>
-              <a:t>2021/8/11</a:t>
+              <a:t>2023/5/9</a:t>
             </a:fld>
             <a:endParaRPr lang="zh-TW" altLang="en-US"/>
           </a:p>
@@ -2497,7 +2497,7 @@
           <a:p>
             <a:fld id="{8ACD5DE7-6A17-44FC-86F1-EC2EE6B5147A}" type="datetimeFigureOut">
               <a:rPr lang="zh-TW" altLang="en-US" smtClean="0"/>
-              <a:t>2021/8/11</a:t>
+              <a:t>2023/5/9</a:t>
             </a:fld>
             <a:endParaRPr lang="zh-TW" altLang="en-US"/>
           </a:p>
@@ -2710,7 +2710,7 @@
           <a:p>
             <a:fld id="{8ACD5DE7-6A17-44FC-86F1-EC2EE6B5147A}" type="datetimeFigureOut">
               <a:rPr lang="zh-TW" altLang="en-US" smtClean="0"/>
-              <a:t>2021/8/11</a:t>
+              <a:t>2023/5/9</a:t>
             </a:fld>
             <a:endParaRPr lang="zh-TW" altLang="en-US"/>
           </a:p>
@@ -3276,17 +3276,7 @@
                 <a:latin typeface="微軟正黑體" pitchFamily="34" charset="-120"/>
                 <a:ea typeface="微軟正黑體" pitchFamily="34" charset="-120"/>
               </a:rPr>
-              <a:t>快來擁戴為</a:t>
-            </a:r>
-            <a:r>
-              <a:rPr lang="zh-TW" altLang="en-US" sz="4800" b="1" dirty="0">
-                <a:solidFill>
-                  <a:srgbClr val="660033"/>
-                </a:solidFill>
-                <a:latin typeface="微軟正黑體" pitchFamily="34" charset="-120"/>
-                <a:ea typeface="微軟正黑體" pitchFamily="34" charset="-120"/>
-              </a:rPr>
-              <a:t>王</a:t>
+              <a:t>快來擁戴為王</a:t>
             </a:r>
             <a:endParaRPr lang="en-US" altLang="zh-TW" sz="4800" b="1" dirty="0">
               <a:solidFill>
@@ -3308,17 +3298,7 @@
                 <a:latin typeface="微軟正黑體" pitchFamily="34" charset="-120"/>
                 <a:ea typeface="微軟正黑體" pitchFamily="34" charset="-120"/>
               </a:rPr>
-              <a:t>無</a:t>
-            </a:r>
-            <a:r>
-              <a:rPr lang="zh-TW" altLang="en-US" sz="4800" b="1" dirty="0">
-                <a:solidFill>
-                  <a:srgbClr val="660033"/>
-                </a:solidFill>
-                <a:latin typeface="微軟正黑體" pitchFamily="34" charset="-120"/>
-                <a:ea typeface="微軟正黑體" pitchFamily="34" charset="-120"/>
-              </a:rPr>
-              <a:t>對生命之王</a:t>
+              <a:t>無對生命之王</a:t>
             </a:r>
             <a:endParaRPr lang="en-US" altLang="zh-TW" sz="4800" b="1" dirty="0">
               <a:solidFill>
@@ -3339,7 +3319,7 @@
         <p:spPr>
           <a:xfrm>
             <a:off x="0" y="3795887"/>
-            <a:ext cx="9144000" cy="646331"/>
+            <a:ext cx="9144000" cy="523220"/>
           </a:xfrm>
           <a:prstGeom prst="rect">
             <a:avLst/>
@@ -3354,7 +3334,7 @@
           <a:p>
             <a:pPr algn="ctr"/>
             <a:r>
-              <a:rPr lang="en-US" sz="3600" b="1" dirty="0">
+              <a:rPr lang="en-US" sz="2800" b="1" dirty="0">
                 <a:solidFill>
                   <a:srgbClr val="660033"/>
                 </a:solidFill>
@@ -3362,7 +3342,7 @@
               <a:t>( </a:t>
             </a:r>
             <a:r>
-              <a:rPr lang="en-US" sz="3600" b="1" dirty="0" smtClean="0">
+              <a:rPr lang="en-US" sz="2800" b="1" dirty="0">
                 <a:solidFill>
                   <a:srgbClr val="660033"/>
                 </a:solidFill>
@@ -3370,14 +3350,14 @@
               <a:t>3 </a:t>
             </a:r>
             <a:r>
-              <a:rPr lang="en-US" sz="3600" b="1" dirty="0">
-                <a:solidFill>
-                  <a:srgbClr val="660033"/>
-                </a:solidFill>
-              </a:rPr>
-              <a:t>)</a:t>
-            </a:r>
-            <a:endParaRPr lang="vi-VN" sz="3600" b="1" dirty="0">
+              <a:rPr lang="en-US" sz="2800" b="1" dirty="0">
+                <a:solidFill>
+                  <a:srgbClr val="660033"/>
+                </a:solidFill>
+              </a:rPr>
+              <a:t>/ 5 )</a:t>
+            </a:r>
+            <a:endParaRPr lang="vi-VN" sz="2800" b="1" dirty="0">
               <a:solidFill>
                 <a:srgbClr val="660033"/>
               </a:solidFill>
@@ -3455,17 +3435,7 @@
                 <a:latin typeface="微軟正黑體" pitchFamily="34" charset="-120"/>
                 <a:ea typeface="微軟正黑體" pitchFamily="34" charset="-120"/>
               </a:rPr>
-              <a:t>萬邦民族都蒙救</a:t>
-            </a:r>
-            <a:r>
-              <a:rPr lang="zh-TW" altLang="en-US" sz="4800" b="1" dirty="0">
-                <a:solidFill>
-                  <a:srgbClr val="660033"/>
-                </a:solidFill>
-                <a:latin typeface="微軟正黑體" pitchFamily="34" charset="-120"/>
-                <a:ea typeface="微軟正黑體" pitchFamily="34" charset="-120"/>
-              </a:rPr>
-              <a:t>渡</a:t>
+              <a:t>萬邦民族都蒙救渡</a:t>
             </a:r>
             <a:endParaRPr lang="en-US" altLang="zh-TW" sz="4800" b="1" dirty="0">
               <a:solidFill>
@@ -3487,17 +3457,7 @@
                 <a:latin typeface="微軟正黑體" pitchFamily="34" charset="-120"/>
                 <a:ea typeface="微軟正黑體" pitchFamily="34" charset="-120"/>
               </a:rPr>
-              <a:t>因</a:t>
-            </a:r>
-            <a:r>
-              <a:rPr lang="zh-TW" altLang="en-US" sz="4800" b="1" dirty="0">
-                <a:solidFill>
-                  <a:srgbClr val="660033"/>
-                </a:solidFill>
-                <a:latin typeface="微軟正黑體" pitchFamily="34" charset="-120"/>
-                <a:ea typeface="微軟正黑體" pitchFamily="34" charset="-120"/>
-              </a:rPr>
-              <a:t>祂消滅死亡</a:t>
+              <a:t>因祂消滅死亡</a:t>
             </a:r>
             <a:endParaRPr lang="en-US" altLang="zh-TW" sz="4800" b="1" dirty="0">
               <a:solidFill>
@@ -3518,7 +3478,7 @@
         <p:spPr>
           <a:xfrm>
             <a:off x="0" y="3795887"/>
-            <a:ext cx="9144000" cy="646331"/>
+            <a:ext cx="9144000" cy="523220"/>
           </a:xfrm>
           <a:prstGeom prst="rect">
             <a:avLst/>
@@ -3533,30 +3493,14 @@
           <a:p>
             <a:pPr algn="ctr"/>
             <a:r>
-              <a:rPr lang="en-US" sz="3600" b="1" dirty="0">
-                <a:solidFill>
-                  <a:srgbClr val="660033"/>
-                </a:solidFill>
-              </a:rPr>
-              <a:t>( </a:t>
-            </a:r>
-            <a:r>
-              <a:rPr lang="en-US" sz="3600" b="1" dirty="0" smtClean="0">
-                <a:solidFill>
-                  <a:srgbClr val="660033"/>
-                </a:solidFill>
-              </a:rPr>
-              <a:t>3 </a:t>
-            </a:r>
-            <a:r>
-              <a:rPr lang="en-US" sz="3600" b="1" dirty="0">
-                <a:solidFill>
-                  <a:srgbClr val="660033"/>
-                </a:solidFill>
-              </a:rPr>
-              <a:t>)</a:t>
-            </a:r>
-            <a:endParaRPr lang="vi-VN" sz="3600" b="1" dirty="0">
+              <a:rPr lang="en-US" sz="2800" b="1" dirty="0">
+                <a:solidFill>
+                  <a:srgbClr val="660033"/>
+                </a:solidFill>
+              </a:rPr>
+              <a:t>( 3 / 5 )</a:t>
+            </a:r>
+            <a:endParaRPr lang="vi-VN" sz="2800" b="1" dirty="0">
               <a:solidFill>
                 <a:srgbClr val="660033"/>
               </a:solidFill>
@@ -3634,17 +3578,7 @@
                 <a:latin typeface="微軟正黑體" pitchFamily="34" charset="-120"/>
                 <a:ea typeface="微軟正黑體" pitchFamily="34" charset="-120"/>
               </a:rPr>
-              <a:t>快來歌頌歡</a:t>
-            </a:r>
-            <a:r>
-              <a:rPr lang="zh-TW" altLang="en-US" sz="4800" b="1" dirty="0">
-                <a:solidFill>
-                  <a:srgbClr val="660033"/>
-                </a:solidFill>
-                <a:latin typeface="微軟正黑體" pitchFamily="34" charset="-120"/>
-                <a:ea typeface="微軟正黑體" pitchFamily="34" charset="-120"/>
-              </a:rPr>
-              <a:t>欣</a:t>
+              <a:t>快來歌頌歡欣</a:t>
             </a:r>
             <a:endParaRPr lang="en-US" altLang="zh-TW" sz="4800" b="1" dirty="0">
               <a:solidFill>
@@ -3666,17 +3600,7 @@
                 <a:latin typeface="微軟正黑體" pitchFamily="34" charset="-120"/>
                 <a:ea typeface="微軟正黑體" pitchFamily="34" charset="-120"/>
               </a:rPr>
-              <a:t>謝</a:t>
-            </a:r>
-            <a:r>
-              <a:rPr lang="zh-TW" altLang="en-US" sz="4800" b="1" dirty="0">
-                <a:solidFill>
-                  <a:srgbClr val="660033"/>
-                </a:solidFill>
-                <a:latin typeface="微軟正黑體" pitchFamily="34" charset="-120"/>
-                <a:ea typeface="微軟正黑體" pitchFamily="34" charset="-120"/>
-              </a:rPr>
-              <a:t>祂特殊宏恩</a:t>
+              <a:t>謝祂特殊宏恩</a:t>
             </a:r>
             <a:endParaRPr lang="en-US" altLang="zh-TW" sz="4800" b="1" dirty="0">
               <a:solidFill>
@@ -3697,7 +3621,7 @@
         <p:spPr>
           <a:xfrm>
             <a:off x="0" y="3795887"/>
-            <a:ext cx="9144000" cy="646331"/>
+            <a:ext cx="9144000" cy="523220"/>
           </a:xfrm>
           <a:prstGeom prst="rect">
             <a:avLst/>
@@ -3712,30 +3636,14 @@
           <a:p>
             <a:pPr algn="ctr"/>
             <a:r>
-              <a:rPr lang="en-US" sz="3600" b="1" dirty="0">
-                <a:solidFill>
-                  <a:srgbClr val="660033"/>
-                </a:solidFill>
-              </a:rPr>
-              <a:t>( </a:t>
-            </a:r>
-            <a:r>
-              <a:rPr lang="en-US" sz="3600" b="1" dirty="0" smtClean="0">
-                <a:solidFill>
-                  <a:srgbClr val="660033"/>
-                </a:solidFill>
-              </a:rPr>
-              <a:t>3 </a:t>
-            </a:r>
-            <a:r>
-              <a:rPr lang="en-US" sz="3600" b="1" dirty="0">
-                <a:solidFill>
-                  <a:srgbClr val="660033"/>
-                </a:solidFill>
-              </a:rPr>
-              <a:t>)</a:t>
-            </a:r>
-            <a:endParaRPr lang="vi-VN" sz="3600" b="1" dirty="0">
+              <a:rPr lang="en-US" sz="2800" b="1" dirty="0">
+                <a:solidFill>
+                  <a:srgbClr val="660033"/>
+                </a:solidFill>
+              </a:rPr>
+              <a:t>( 3 / 5 )</a:t>
+            </a:r>
+            <a:endParaRPr lang="vi-VN" sz="2800" b="1" dirty="0">
               <a:solidFill>
                 <a:srgbClr val="660033"/>
               </a:solidFill>
@@ -3813,17 +3721,7 @@
                 <a:latin typeface="微軟正黑體" pitchFamily="34" charset="-120"/>
                 <a:ea typeface="微軟正黑體" pitchFamily="34" charset="-120"/>
               </a:rPr>
-              <a:t>因祂一死戰勝萬</a:t>
-            </a:r>
-            <a:r>
-              <a:rPr lang="zh-TW" altLang="en-US" sz="4800" b="1" dirty="0">
-                <a:solidFill>
-                  <a:srgbClr val="660033"/>
-                </a:solidFill>
-                <a:latin typeface="微軟正黑體" pitchFamily="34" charset="-120"/>
-                <a:ea typeface="微軟正黑體" pitchFamily="34" charset="-120"/>
-              </a:rPr>
-              <a:t>死</a:t>
+              <a:t>因祂一死戰勝萬死</a:t>
             </a:r>
             <a:endParaRPr lang="en-US" altLang="zh-TW" sz="4800" b="1" dirty="0">
               <a:solidFill>
@@ -3845,17 +3743,7 @@
                 <a:latin typeface="微軟正黑體" pitchFamily="34" charset="-120"/>
                 <a:ea typeface="微軟正黑體" pitchFamily="34" charset="-120"/>
               </a:rPr>
-              <a:t>永</a:t>
-            </a:r>
-            <a:r>
-              <a:rPr lang="zh-TW" altLang="en-US" sz="4800" b="1" dirty="0">
-                <a:solidFill>
-                  <a:srgbClr val="660033"/>
-                </a:solidFill>
-                <a:latin typeface="微軟正黑體" pitchFamily="34" charset="-120"/>
-                <a:ea typeface="微軟正黑體" pitchFamily="34" charset="-120"/>
-              </a:rPr>
-              <a:t>生普及群生</a:t>
+              <a:t>永生普及群生</a:t>
             </a:r>
           </a:p>
         </p:txBody>
@@ -3869,7 +3757,7 @@
         <p:spPr>
           <a:xfrm>
             <a:off x="0" y="3795887"/>
-            <a:ext cx="9144000" cy="646331"/>
+            <a:ext cx="9144000" cy="523220"/>
           </a:xfrm>
           <a:prstGeom prst="rect">
             <a:avLst/>
@@ -3884,30 +3772,14 @@
           <a:p>
             <a:pPr algn="ctr"/>
             <a:r>
-              <a:rPr lang="en-US" sz="3600" b="1" dirty="0">
-                <a:solidFill>
-                  <a:srgbClr val="660033"/>
-                </a:solidFill>
-              </a:rPr>
-              <a:t>( </a:t>
-            </a:r>
-            <a:r>
-              <a:rPr lang="en-US" sz="3600" b="1" dirty="0" smtClean="0">
-                <a:solidFill>
-                  <a:srgbClr val="660033"/>
-                </a:solidFill>
-              </a:rPr>
-              <a:t>3 </a:t>
-            </a:r>
-            <a:r>
-              <a:rPr lang="en-US" sz="3600" b="1" dirty="0">
-                <a:solidFill>
-                  <a:srgbClr val="660033"/>
-                </a:solidFill>
-              </a:rPr>
-              <a:t>)</a:t>
-            </a:r>
-            <a:endParaRPr lang="vi-VN" sz="3600" b="1" dirty="0">
+              <a:rPr lang="en-US" sz="2800" b="1" dirty="0">
+                <a:solidFill>
+                  <a:srgbClr val="660033"/>
+                </a:solidFill>
+              </a:rPr>
+              <a:t>( 3 / 5 )</a:t>
+            </a:r>
+            <a:endParaRPr lang="vi-VN" sz="2800" b="1" dirty="0">
               <a:solidFill>
                 <a:srgbClr val="660033"/>
               </a:solidFill>
@@ -3985,17 +3857,7 @@
                 <a:latin typeface="微軟正黑體" pitchFamily="34" charset="-120"/>
                 <a:ea typeface="微軟正黑體" pitchFamily="34" charset="-120"/>
               </a:rPr>
-              <a:t>快來擁戴為</a:t>
-            </a:r>
-            <a:r>
-              <a:rPr lang="zh-TW" altLang="en-US" sz="4800" b="1" dirty="0">
-                <a:solidFill>
-                  <a:srgbClr val="660033"/>
-                </a:solidFill>
-                <a:latin typeface="微軟正黑體" pitchFamily="34" charset="-120"/>
-                <a:ea typeface="微軟正黑體" pitchFamily="34" charset="-120"/>
-              </a:rPr>
-              <a:t>王</a:t>
+              <a:t>快來擁戴為王</a:t>
             </a:r>
             <a:endParaRPr lang="en-US" altLang="zh-TW" sz="4800" b="1" dirty="0">
               <a:solidFill>
@@ -4017,27 +3879,7 @@
                 <a:latin typeface="微軟正黑體" pitchFamily="34" charset="-120"/>
                 <a:ea typeface="微軟正黑體" pitchFamily="34" charset="-120"/>
               </a:rPr>
-              <a:t>永</a:t>
-            </a:r>
-            <a:r>
-              <a:rPr lang="zh-TW" altLang="en-US" sz="4800" b="1" dirty="0">
-                <a:solidFill>
-                  <a:srgbClr val="660033"/>
-                </a:solidFill>
-                <a:latin typeface="微軟正黑體" pitchFamily="34" charset="-120"/>
-                <a:ea typeface="微軟正黑體" pitchFamily="34" charset="-120"/>
-              </a:rPr>
-              <a:t>建和平之</a:t>
-            </a:r>
-            <a:r>
-              <a:rPr lang="zh-TW" altLang="en-US" sz="4800" b="1" dirty="0">
-                <a:solidFill>
-                  <a:srgbClr val="660033"/>
-                </a:solidFill>
-                <a:latin typeface="微軟正黑體" pitchFamily="34" charset="-120"/>
-                <a:ea typeface="微軟正黑體" pitchFamily="34" charset="-120"/>
-              </a:rPr>
-              <a:t>王</a:t>
+              <a:t>永建和平之王</a:t>
             </a:r>
             <a:endParaRPr lang="en-US" altLang="zh-TW" sz="4800" b="1" dirty="0">
               <a:solidFill>
@@ -4058,7 +3900,7 @@
         <p:spPr>
           <a:xfrm>
             <a:off x="0" y="3795887"/>
-            <a:ext cx="9144000" cy="646331"/>
+            <a:ext cx="9144000" cy="523220"/>
           </a:xfrm>
           <a:prstGeom prst="rect">
             <a:avLst/>
@@ -4073,7 +3915,7 @@
           <a:p>
             <a:pPr algn="ctr"/>
             <a:r>
-              <a:rPr lang="en-US" sz="3600" b="1" dirty="0">
+              <a:rPr lang="en-US" sz="2800" b="1" dirty="0">
                 <a:solidFill>
                   <a:srgbClr val="660033"/>
                 </a:solidFill>
@@ -4081,7 +3923,7 @@
               <a:t>( </a:t>
             </a:r>
             <a:r>
-              <a:rPr lang="en-US" sz="3600" b="1" dirty="0" smtClean="0">
+              <a:rPr lang="en-US" sz="2800" b="1" dirty="0">
                 <a:solidFill>
                   <a:srgbClr val="660033"/>
                 </a:solidFill>
@@ -4089,14 +3931,14 @@
               <a:t>4 </a:t>
             </a:r>
             <a:r>
-              <a:rPr lang="en-US" sz="3600" b="1" dirty="0">
-                <a:solidFill>
-                  <a:srgbClr val="660033"/>
-                </a:solidFill>
-              </a:rPr>
-              <a:t>)</a:t>
-            </a:r>
-            <a:endParaRPr lang="vi-VN" sz="3600" b="1" dirty="0">
+              <a:rPr lang="en-US" sz="2800" b="1" dirty="0">
+                <a:solidFill>
+                  <a:srgbClr val="660033"/>
+                </a:solidFill>
+              </a:rPr>
+              <a:t>/ 5 )</a:t>
+            </a:r>
+            <a:endParaRPr lang="vi-VN" sz="2800" b="1" dirty="0">
               <a:solidFill>
                 <a:srgbClr val="660033"/>
               </a:solidFill>
@@ -4174,27 +4016,7 @@
                 <a:latin typeface="微軟正黑體" pitchFamily="34" charset="-120"/>
                 <a:ea typeface="微軟正黑體" pitchFamily="34" charset="-120"/>
               </a:rPr>
-              <a:t>普</a:t>
-            </a:r>
-            <a:r>
-              <a:rPr lang="zh-TW" altLang="en-US" sz="4800" b="1" dirty="0">
-                <a:solidFill>
-                  <a:srgbClr val="660033"/>
-                </a:solidFill>
-                <a:latin typeface="微軟正黑體" pitchFamily="34" charset="-120"/>
-                <a:ea typeface="微軟正黑體" pitchFamily="34" charset="-120"/>
-              </a:rPr>
-              <a:t>天之下戰事止</a:t>
-            </a:r>
-            <a:r>
-              <a:rPr lang="zh-TW" altLang="en-US" sz="4800" b="1" dirty="0">
-                <a:solidFill>
-                  <a:srgbClr val="660033"/>
-                </a:solidFill>
-                <a:latin typeface="微軟正黑體" pitchFamily="34" charset="-120"/>
-                <a:ea typeface="微軟正黑體" pitchFamily="34" charset="-120"/>
-              </a:rPr>
-              <a:t>息</a:t>
+              <a:t>普天之下戰事止息</a:t>
             </a:r>
             <a:endParaRPr lang="en-US" altLang="zh-TW" sz="4800" b="1" dirty="0">
               <a:solidFill>
@@ -4216,17 +4038,7 @@
                 <a:latin typeface="微軟正黑體" pitchFamily="34" charset="-120"/>
                 <a:ea typeface="微軟正黑體" pitchFamily="34" charset="-120"/>
               </a:rPr>
-              <a:t>干</a:t>
-            </a:r>
-            <a:r>
-              <a:rPr lang="zh-TW" altLang="en-US" sz="4800" b="1" dirty="0">
-                <a:solidFill>
-                  <a:srgbClr val="660033"/>
-                </a:solidFill>
-                <a:latin typeface="微軟正黑體" pitchFamily="34" charset="-120"/>
-                <a:ea typeface="微軟正黑體" pitchFamily="34" charset="-120"/>
-              </a:rPr>
-              <a:t>戈化為頌揚</a:t>
+              <a:t>干戈化為頌揚</a:t>
             </a:r>
             <a:endParaRPr lang="en-US" altLang="zh-TW" sz="4800" b="1" dirty="0">
               <a:solidFill>
@@ -4247,7 +4059,7 @@
         <p:spPr>
           <a:xfrm>
             <a:off x="0" y="3795887"/>
-            <a:ext cx="9144000" cy="646331"/>
+            <a:ext cx="9144000" cy="523220"/>
           </a:xfrm>
           <a:prstGeom prst="rect">
             <a:avLst/>
@@ -4262,30 +4074,14 @@
           <a:p>
             <a:pPr algn="ctr"/>
             <a:r>
-              <a:rPr lang="en-US" sz="3600" b="1" dirty="0">
-                <a:solidFill>
-                  <a:srgbClr val="660033"/>
-                </a:solidFill>
-              </a:rPr>
-              <a:t>( </a:t>
-            </a:r>
-            <a:r>
-              <a:rPr lang="en-US" sz="3600" b="1" dirty="0" smtClean="0">
-                <a:solidFill>
-                  <a:srgbClr val="660033"/>
-                </a:solidFill>
-              </a:rPr>
-              <a:t>4 </a:t>
-            </a:r>
-            <a:r>
-              <a:rPr lang="en-US" sz="3600" b="1" dirty="0">
-                <a:solidFill>
-                  <a:srgbClr val="660033"/>
-                </a:solidFill>
-              </a:rPr>
-              <a:t>)</a:t>
-            </a:r>
-            <a:endParaRPr lang="vi-VN" sz="3600" b="1" dirty="0">
+              <a:rPr lang="en-US" sz="2800" b="1" dirty="0">
+                <a:solidFill>
+                  <a:srgbClr val="660033"/>
+                </a:solidFill>
+              </a:rPr>
+              <a:t>( 4 / 5 )</a:t>
+            </a:r>
+            <a:endParaRPr lang="vi-VN" sz="2800" b="1" dirty="0">
               <a:solidFill>
                 <a:srgbClr val="660033"/>
               </a:solidFill>
@@ -4363,17 +4159,7 @@
                 <a:latin typeface="微軟正黑體" pitchFamily="34" charset="-120"/>
                 <a:ea typeface="微軟正黑體" pitchFamily="34" charset="-120"/>
               </a:rPr>
-              <a:t>主治萬國萬</a:t>
-            </a:r>
-            <a:r>
-              <a:rPr lang="zh-TW" altLang="en-US" sz="4800" b="1" dirty="0">
-                <a:solidFill>
-                  <a:srgbClr val="660033"/>
-                </a:solidFill>
-                <a:latin typeface="微軟正黑體" pitchFamily="34" charset="-120"/>
-                <a:ea typeface="微軟正黑體" pitchFamily="34" charset="-120"/>
-              </a:rPr>
-              <a:t>方</a:t>
+              <a:t>主治萬國萬方</a:t>
             </a:r>
             <a:endParaRPr lang="en-US" altLang="zh-TW" sz="4800" b="1" dirty="0">
               <a:solidFill>
@@ -4395,17 +4181,7 @@
                 <a:latin typeface="微軟正黑體" pitchFamily="34" charset="-120"/>
                 <a:ea typeface="微軟正黑體" pitchFamily="34" charset="-120"/>
               </a:rPr>
-              <a:t>主</a:t>
-            </a:r>
-            <a:r>
-              <a:rPr lang="zh-TW" altLang="en-US" sz="4800" b="1" dirty="0">
-                <a:solidFill>
-                  <a:srgbClr val="660033"/>
-                </a:solidFill>
-                <a:latin typeface="微軟正黑體" pitchFamily="34" charset="-120"/>
-                <a:ea typeface="微軟正黑體" pitchFamily="34" charset="-120"/>
-              </a:rPr>
-              <a:t>權地久天長</a:t>
+              <a:t>主權地久天長</a:t>
             </a:r>
             <a:endParaRPr lang="en-US" altLang="zh-TW" sz="4800" b="1" dirty="0">
               <a:solidFill>
@@ -4426,7 +4202,7 @@
         <p:spPr>
           <a:xfrm>
             <a:off x="0" y="3795887"/>
-            <a:ext cx="9144000" cy="646331"/>
+            <a:ext cx="9144000" cy="523220"/>
           </a:xfrm>
           <a:prstGeom prst="rect">
             <a:avLst/>
@@ -4441,30 +4217,14 @@
           <a:p>
             <a:pPr algn="ctr"/>
             <a:r>
-              <a:rPr lang="en-US" sz="3600" b="1" dirty="0">
-                <a:solidFill>
-                  <a:srgbClr val="660033"/>
-                </a:solidFill>
-              </a:rPr>
-              <a:t>( </a:t>
-            </a:r>
-            <a:r>
-              <a:rPr lang="en-US" sz="3600" b="1" dirty="0" smtClean="0">
-                <a:solidFill>
-                  <a:srgbClr val="660033"/>
-                </a:solidFill>
-              </a:rPr>
-              <a:t>4 </a:t>
-            </a:r>
-            <a:r>
-              <a:rPr lang="en-US" sz="3600" b="1" dirty="0">
-                <a:solidFill>
-                  <a:srgbClr val="660033"/>
-                </a:solidFill>
-              </a:rPr>
-              <a:t>)</a:t>
-            </a:r>
-            <a:endParaRPr lang="vi-VN" sz="3600" b="1" dirty="0">
+              <a:rPr lang="en-US" sz="2800" b="1" dirty="0">
+                <a:solidFill>
+                  <a:srgbClr val="660033"/>
+                </a:solidFill>
+              </a:rPr>
+              <a:t>( 4 / 5 )</a:t>
+            </a:r>
+            <a:endParaRPr lang="vi-VN" sz="2800" b="1" dirty="0">
               <a:solidFill>
                 <a:srgbClr val="660033"/>
               </a:solidFill>
@@ -4542,17 +4302,7 @@
                 <a:latin typeface="微軟正黑體" pitchFamily="34" charset="-120"/>
                 <a:ea typeface="微軟正黑體" pitchFamily="34" charset="-120"/>
               </a:rPr>
-              <a:t>寶血所滋生命花</a:t>
-            </a:r>
-            <a:r>
-              <a:rPr lang="zh-TW" altLang="en-US" sz="4800" b="1" dirty="0">
-                <a:solidFill>
-                  <a:srgbClr val="660033"/>
-                </a:solidFill>
-                <a:latin typeface="微軟正黑體" pitchFamily="34" charset="-120"/>
-                <a:ea typeface="微軟正黑體" pitchFamily="34" charset="-120"/>
-              </a:rPr>
-              <a:t>放</a:t>
+              <a:t>寶血所滋生命花放</a:t>
             </a:r>
             <a:endParaRPr lang="en-US" altLang="zh-TW" sz="4800" b="1" dirty="0">
               <a:solidFill>
@@ -4574,17 +4324,7 @@
                 <a:latin typeface="微軟正黑體" pitchFamily="34" charset="-120"/>
                 <a:ea typeface="微軟正黑體" pitchFamily="34" charset="-120"/>
               </a:rPr>
-              <a:t>薈</a:t>
-            </a:r>
-            <a:r>
-              <a:rPr lang="zh-TW" altLang="en-US" sz="4800" b="1" dirty="0">
-                <a:solidFill>
-                  <a:srgbClr val="660033"/>
-                </a:solidFill>
-                <a:latin typeface="微軟正黑體" pitchFamily="34" charset="-120"/>
-                <a:ea typeface="微軟正黑體" pitchFamily="34" charset="-120"/>
-              </a:rPr>
-              <a:t>成異彩天香</a:t>
+              <a:t>薈成異彩天香</a:t>
             </a:r>
           </a:p>
         </p:txBody>
@@ -4598,7 +4338,7 @@
         <p:spPr>
           <a:xfrm>
             <a:off x="0" y="3795887"/>
-            <a:ext cx="9144000" cy="646331"/>
+            <a:ext cx="9144000" cy="523220"/>
           </a:xfrm>
           <a:prstGeom prst="rect">
             <a:avLst/>
@@ -4613,30 +4353,14 @@
           <a:p>
             <a:pPr algn="ctr"/>
             <a:r>
-              <a:rPr lang="en-US" sz="3600" b="1" dirty="0">
-                <a:solidFill>
-                  <a:srgbClr val="660033"/>
-                </a:solidFill>
-              </a:rPr>
-              <a:t>( </a:t>
-            </a:r>
-            <a:r>
-              <a:rPr lang="en-US" sz="3600" b="1" dirty="0" smtClean="0">
-                <a:solidFill>
-                  <a:srgbClr val="660033"/>
-                </a:solidFill>
-              </a:rPr>
-              <a:t>4 </a:t>
-            </a:r>
-            <a:r>
-              <a:rPr lang="en-US" sz="3600" b="1" dirty="0">
-                <a:solidFill>
-                  <a:srgbClr val="660033"/>
-                </a:solidFill>
-              </a:rPr>
-              <a:t>)</a:t>
-            </a:r>
-            <a:endParaRPr lang="vi-VN" sz="3600" b="1" dirty="0">
+              <a:rPr lang="en-US" sz="2800" b="1" dirty="0">
+                <a:solidFill>
+                  <a:srgbClr val="660033"/>
+                </a:solidFill>
+              </a:rPr>
+              <a:t>( 4 / 5 )</a:t>
+            </a:r>
+            <a:endParaRPr lang="vi-VN" sz="2800" b="1" dirty="0">
               <a:solidFill>
                 <a:srgbClr val="660033"/>
               </a:solidFill>
@@ -4777,7 +4501,7 @@
         <p:spPr>
           <a:xfrm>
             <a:off x="0" y="3795887"/>
-            <a:ext cx="9144000" cy="646331"/>
+            <a:ext cx="9144000" cy="523220"/>
           </a:xfrm>
           <a:prstGeom prst="rect">
             <a:avLst/>
@@ -4792,7 +4516,7 @@
           <a:p>
             <a:pPr algn="ctr"/>
             <a:r>
-              <a:rPr lang="en-US" sz="3600" b="1" dirty="0">
+              <a:rPr lang="en-US" sz="2800" b="1" dirty="0">
                 <a:solidFill>
                   <a:srgbClr val="660033"/>
                 </a:solidFill>
@@ -4800,7 +4524,7 @@
               <a:t>( </a:t>
             </a:r>
             <a:r>
-              <a:rPr lang="en-US" sz="3600" b="1" dirty="0" smtClean="0">
+              <a:rPr lang="en-US" sz="2800" b="1" dirty="0">
                 <a:solidFill>
                   <a:srgbClr val="660033"/>
                 </a:solidFill>
@@ -4808,14 +4532,14 @@
               <a:t>5 </a:t>
             </a:r>
             <a:r>
-              <a:rPr lang="en-US" sz="3600" b="1" dirty="0">
-                <a:solidFill>
-                  <a:srgbClr val="660033"/>
-                </a:solidFill>
-              </a:rPr>
-              <a:t>)</a:t>
-            </a:r>
-            <a:endParaRPr lang="vi-VN" sz="3600" b="1" dirty="0">
+              <a:rPr lang="en-US" sz="2800" b="1" dirty="0">
+                <a:solidFill>
+                  <a:srgbClr val="660033"/>
+                </a:solidFill>
+              </a:rPr>
+              <a:t>/ 5 )</a:t>
+            </a:r>
+            <a:endParaRPr lang="vi-VN" sz="2800" b="1" dirty="0">
               <a:solidFill>
                 <a:srgbClr val="660033"/>
               </a:solidFill>
@@ -4956,7 +4680,7 @@
         <p:spPr>
           <a:xfrm>
             <a:off x="0" y="3795887"/>
-            <a:ext cx="9144000" cy="646331"/>
+            <a:ext cx="9144000" cy="523220"/>
           </a:xfrm>
           <a:prstGeom prst="rect">
             <a:avLst/>
@@ -4971,30 +4695,14 @@
           <a:p>
             <a:pPr algn="ctr"/>
             <a:r>
-              <a:rPr lang="en-US" sz="3600" b="1" dirty="0">
-                <a:solidFill>
-                  <a:srgbClr val="660033"/>
-                </a:solidFill>
-              </a:rPr>
-              <a:t>( </a:t>
-            </a:r>
-            <a:r>
-              <a:rPr lang="en-US" sz="3600" b="1" dirty="0" smtClean="0">
-                <a:solidFill>
-                  <a:srgbClr val="660033"/>
-                </a:solidFill>
-              </a:rPr>
-              <a:t>5 </a:t>
-            </a:r>
-            <a:r>
-              <a:rPr lang="en-US" sz="3600" b="1" dirty="0">
-                <a:solidFill>
-                  <a:srgbClr val="660033"/>
-                </a:solidFill>
-              </a:rPr>
-              <a:t>)</a:t>
-            </a:r>
-            <a:endParaRPr lang="vi-VN" sz="3600" b="1" dirty="0">
+              <a:rPr lang="en-US" sz="2800" b="1" dirty="0">
+                <a:solidFill>
+                  <a:srgbClr val="660033"/>
+                </a:solidFill>
+              </a:rPr>
+              <a:t>( 5 / 5 )</a:t>
+            </a:r>
+            <a:endParaRPr lang="vi-VN" sz="2800" b="1" dirty="0">
               <a:solidFill>
                 <a:srgbClr val="660033"/>
               </a:solidFill>
@@ -5145,7 +4853,7 @@
         <p:spPr>
           <a:xfrm>
             <a:off x="0" y="3795887"/>
-            <a:ext cx="9144000" cy="646331"/>
+            <a:ext cx="9144000" cy="523220"/>
           </a:xfrm>
           <a:prstGeom prst="rect">
             <a:avLst/>
@@ -5160,14 +4868,30 @@
           <a:p>
             <a:pPr algn="ctr"/>
             <a:r>
-              <a:rPr lang="en-US" sz="3600" b="1" dirty="0">
-                <a:solidFill>
-                  <a:srgbClr val="660033"/>
-                </a:solidFill>
-              </a:rPr>
-              <a:t>( 1 )</a:t>
-            </a:r>
-            <a:endParaRPr lang="vi-VN" sz="3600" b="1" dirty="0">
+              <a:rPr lang="en-US" sz="2800" b="1" dirty="0">
+                <a:solidFill>
+                  <a:srgbClr val="660033"/>
+                </a:solidFill>
+              </a:rPr>
+              <a:t>( </a:t>
+            </a:r>
+            <a:r>
+              <a:rPr lang="en-US" sz="2800" b="1" dirty="0" smtClean="0">
+                <a:solidFill>
+                  <a:srgbClr val="660033"/>
+                </a:solidFill>
+              </a:rPr>
+              <a:t>1 / 5 </a:t>
+            </a:r>
+            <a:r>
+              <a:rPr lang="en-US" sz="2800" b="1" dirty="0">
+                <a:solidFill>
+                  <a:srgbClr val="660033"/>
+                </a:solidFill>
+              </a:rPr>
+              <a:t>)</a:t>
+            </a:r>
+            <a:endParaRPr lang="vi-VN" sz="2800" b="1" dirty="0">
               <a:solidFill>
                 <a:srgbClr val="660033"/>
               </a:solidFill>
@@ -5308,7 +5032,7 @@
         <p:spPr>
           <a:xfrm>
             <a:off x="0" y="3795887"/>
-            <a:ext cx="9144000" cy="646331"/>
+            <a:ext cx="9144000" cy="523220"/>
           </a:xfrm>
           <a:prstGeom prst="rect">
             <a:avLst/>
@@ -5323,30 +5047,14 @@
           <a:p>
             <a:pPr algn="ctr"/>
             <a:r>
-              <a:rPr lang="en-US" sz="3600" b="1" dirty="0">
-                <a:solidFill>
-                  <a:srgbClr val="660033"/>
-                </a:solidFill>
-              </a:rPr>
-              <a:t>( </a:t>
-            </a:r>
-            <a:r>
-              <a:rPr lang="en-US" sz="3600" b="1" dirty="0" smtClean="0">
-                <a:solidFill>
-                  <a:srgbClr val="660033"/>
-                </a:solidFill>
-              </a:rPr>
-              <a:t>5 </a:t>
-            </a:r>
-            <a:r>
-              <a:rPr lang="en-US" sz="3600" b="1" dirty="0">
-                <a:solidFill>
-                  <a:srgbClr val="660033"/>
-                </a:solidFill>
-              </a:rPr>
-              <a:t>)</a:t>
-            </a:r>
-            <a:endParaRPr lang="vi-VN" sz="3600" b="1" dirty="0">
+              <a:rPr lang="en-US" sz="2800" b="1" dirty="0">
+                <a:solidFill>
+                  <a:srgbClr val="660033"/>
+                </a:solidFill>
+              </a:rPr>
+              <a:t>( 5 / 5 )</a:t>
+            </a:r>
+            <a:endParaRPr lang="vi-VN" sz="2800" b="1" dirty="0">
               <a:solidFill>
                 <a:srgbClr val="660033"/>
               </a:solidFill>
@@ -5468,13 +5176,6 @@
               </a:rPr>
               <a:t>眾昭事維寅</a:t>
             </a:r>
-            <a:endParaRPr lang="zh-TW" altLang="en-US" sz="4800" b="1" dirty="0">
-              <a:solidFill>
-                <a:srgbClr val="660033"/>
-              </a:solidFill>
-              <a:latin typeface="微軟正黑體" pitchFamily="34" charset="-120"/>
-              <a:ea typeface="微軟正黑體" pitchFamily="34" charset="-120"/>
-            </a:endParaRPr>
           </a:p>
         </p:txBody>
       </p:sp>
@@ -5487,7 +5188,7 @@
         <p:spPr>
           <a:xfrm>
             <a:off x="0" y="3795887"/>
-            <a:ext cx="9144000" cy="646331"/>
+            <a:ext cx="9144000" cy="523220"/>
           </a:xfrm>
           <a:prstGeom prst="rect">
             <a:avLst/>
@@ -5502,30 +5203,14 @@
           <a:p>
             <a:pPr algn="ctr"/>
             <a:r>
-              <a:rPr lang="en-US" sz="3600" b="1" dirty="0">
-                <a:solidFill>
-                  <a:srgbClr val="660033"/>
-                </a:solidFill>
-              </a:rPr>
-              <a:t>( </a:t>
-            </a:r>
-            <a:r>
-              <a:rPr lang="en-US" sz="3600" b="1" dirty="0" smtClean="0">
-                <a:solidFill>
-                  <a:srgbClr val="660033"/>
-                </a:solidFill>
-              </a:rPr>
-              <a:t>5 </a:t>
-            </a:r>
-            <a:r>
-              <a:rPr lang="en-US" sz="3600" b="1" dirty="0">
-                <a:solidFill>
-                  <a:srgbClr val="660033"/>
-                </a:solidFill>
-              </a:rPr>
-              <a:t>)</a:t>
-            </a:r>
-            <a:endParaRPr lang="vi-VN" sz="3600" b="1" dirty="0">
+              <a:rPr lang="en-US" sz="2800" b="1" dirty="0">
+                <a:solidFill>
+                  <a:srgbClr val="660033"/>
+                </a:solidFill>
+              </a:rPr>
+              <a:t>( 5 / 5 )</a:t>
+            </a:r>
+            <a:endParaRPr lang="vi-VN" sz="2800" b="1" dirty="0">
               <a:solidFill>
                 <a:srgbClr val="660033"/>
               </a:solidFill>
@@ -5676,7 +5361,7 @@
         <p:spPr>
           <a:xfrm>
             <a:off x="0" y="3795887"/>
-            <a:ext cx="9144000" cy="646331"/>
+            <a:ext cx="9144000" cy="523220"/>
           </a:xfrm>
           <a:prstGeom prst="rect">
             <a:avLst/>
@@ -5691,14 +5376,14 @@
           <a:p>
             <a:pPr algn="ctr"/>
             <a:r>
-              <a:rPr lang="en-US" sz="3600" b="1" dirty="0">
-                <a:solidFill>
-                  <a:srgbClr val="660033"/>
-                </a:solidFill>
-              </a:rPr>
-              <a:t>( 1 )</a:t>
-            </a:r>
-            <a:endParaRPr lang="vi-VN" sz="3600" b="1" dirty="0">
+              <a:rPr lang="en-US" sz="2800" b="1" dirty="0">
+                <a:solidFill>
+                  <a:srgbClr val="660033"/>
+                </a:solidFill>
+              </a:rPr>
+              <a:t>( 1 / 5 )</a:t>
+            </a:r>
+            <a:endParaRPr lang="vi-VN" sz="2800" b="1" dirty="0">
               <a:solidFill>
                 <a:srgbClr val="660033"/>
               </a:solidFill>
@@ -5839,7 +5524,7 @@
         <p:spPr>
           <a:xfrm>
             <a:off x="0" y="3795887"/>
-            <a:ext cx="9144000" cy="646331"/>
+            <a:ext cx="9144000" cy="523220"/>
           </a:xfrm>
           <a:prstGeom prst="rect">
             <a:avLst/>
@@ -5854,14 +5539,14 @@
           <a:p>
             <a:pPr algn="ctr"/>
             <a:r>
-              <a:rPr lang="en-US" sz="3600" b="1" dirty="0">
-                <a:solidFill>
-                  <a:srgbClr val="660033"/>
-                </a:solidFill>
-              </a:rPr>
-              <a:t>( 1 )</a:t>
-            </a:r>
-            <a:endParaRPr lang="vi-VN" sz="3600" b="1" dirty="0">
+              <a:rPr lang="en-US" sz="2800" b="1" dirty="0">
+                <a:solidFill>
+                  <a:srgbClr val="660033"/>
+                </a:solidFill>
+              </a:rPr>
+              <a:t>( 1 / 5 )</a:t>
+            </a:r>
+            <a:endParaRPr lang="vi-VN" sz="2800" b="1" dirty="0">
               <a:solidFill>
                 <a:srgbClr val="660033"/>
               </a:solidFill>
@@ -5983,13 +5668,6 @@
               </a:rPr>
               <a:t>秋萬歲無疆</a:t>
             </a:r>
-            <a:endParaRPr lang="zh-TW" altLang="en-US" sz="4800" b="1" dirty="0">
-              <a:solidFill>
-                <a:srgbClr val="660033"/>
-              </a:solidFill>
-              <a:latin typeface="微軟正黑體" pitchFamily="34" charset="-120"/>
-              <a:ea typeface="微軟正黑體" pitchFamily="34" charset="-120"/>
-            </a:endParaRPr>
           </a:p>
         </p:txBody>
       </p:sp>
@@ -6002,7 +5680,7 @@
         <p:spPr>
           <a:xfrm>
             <a:off x="0" y="3795887"/>
-            <a:ext cx="9144000" cy="646331"/>
+            <a:ext cx="9144000" cy="523220"/>
           </a:xfrm>
           <a:prstGeom prst="rect">
             <a:avLst/>
@@ -6017,14 +5695,14 @@
           <a:p>
             <a:pPr algn="ctr"/>
             <a:r>
-              <a:rPr lang="en-US" sz="3600" b="1" dirty="0">
-                <a:solidFill>
-                  <a:srgbClr val="660033"/>
-                </a:solidFill>
-              </a:rPr>
-              <a:t>( 1 )</a:t>
-            </a:r>
-            <a:endParaRPr lang="vi-VN" sz="3600" b="1" dirty="0">
+              <a:rPr lang="en-US" sz="2800" b="1" dirty="0">
+                <a:solidFill>
+                  <a:srgbClr val="660033"/>
+                </a:solidFill>
+              </a:rPr>
+              <a:t>( 1 / 5 )</a:t>
+            </a:r>
+            <a:endParaRPr lang="vi-VN" sz="2800" b="1" dirty="0">
               <a:solidFill>
                 <a:srgbClr val="660033"/>
               </a:solidFill>
@@ -6165,7 +5843,7 @@
         <p:spPr>
           <a:xfrm>
             <a:off x="0" y="3795887"/>
-            <a:ext cx="9144000" cy="646331"/>
+            <a:ext cx="9144000" cy="523220"/>
           </a:xfrm>
           <a:prstGeom prst="rect">
             <a:avLst/>
@@ -6180,7 +5858,7 @@
           <a:p>
             <a:pPr algn="ctr"/>
             <a:r>
-              <a:rPr lang="en-US" sz="3600" b="1" dirty="0">
+              <a:rPr lang="en-US" sz="2800" b="1" dirty="0">
                 <a:solidFill>
                   <a:srgbClr val="660033"/>
                 </a:solidFill>
@@ -6188,7 +5866,7 @@
               <a:t>( </a:t>
             </a:r>
             <a:r>
-              <a:rPr lang="en-US" sz="3600" b="1" dirty="0" smtClean="0">
+              <a:rPr lang="en-US" sz="2800" b="1" dirty="0">
                 <a:solidFill>
                   <a:srgbClr val="660033"/>
                 </a:solidFill>
@@ -6196,14 +5874,14 @@
               <a:t>2 </a:t>
             </a:r>
             <a:r>
-              <a:rPr lang="en-US" sz="3600" b="1" dirty="0">
-                <a:solidFill>
-                  <a:srgbClr val="660033"/>
-                </a:solidFill>
-              </a:rPr>
-              <a:t>)</a:t>
-            </a:r>
-            <a:endParaRPr lang="vi-VN" sz="3600" b="1" dirty="0">
+              <a:rPr lang="en-US" sz="2800" b="1" dirty="0">
+                <a:solidFill>
+                  <a:srgbClr val="660033"/>
+                </a:solidFill>
+              </a:rPr>
+              <a:t>/ 5 )</a:t>
+            </a:r>
+            <a:endParaRPr lang="vi-VN" sz="2800" b="1" dirty="0">
               <a:solidFill>
                 <a:srgbClr val="660033"/>
               </a:solidFill>
@@ -6344,7 +6022,7 @@
         <p:spPr>
           <a:xfrm>
             <a:off x="0" y="3795887"/>
-            <a:ext cx="9144000" cy="646331"/>
+            <a:ext cx="9144000" cy="523220"/>
           </a:xfrm>
           <a:prstGeom prst="rect">
             <a:avLst/>
@@ -6359,30 +6037,14 @@
           <a:p>
             <a:pPr algn="ctr"/>
             <a:r>
-              <a:rPr lang="en-US" sz="3600" b="1" dirty="0">
-                <a:solidFill>
-                  <a:srgbClr val="660033"/>
-                </a:solidFill>
-              </a:rPr>
-              <a:t>( </a:t>
-            </a:r>
-            <a:r>
-              <a:rPr lang="en-US" sz="3600" b="1" dirty="0" smtClean="0">
-                <a:solidFill>
-                  <a:srgbClr val="660033"/>
-                </a:solidFill>
-              </a:rPr>
-              <a:t>2 </a:t>
-            </a:r>
-            <a:r>
-              <a:rPr lang="en-US" sz="3600" b="1" dirty="0">
-                <a:solidFill>
-                  <a:srgbClr val="660033"/>
-                </a:solidFill>
-              </a:rPr>
-              <a:t>)</a:t>
-            </a:r>
-            <a:endParaRPr lang="vi-VN" sz="3600" b="1" dirty="0">
+              <a:rPr lang="en-US" sz="2800" b="1" dirty="0">
+                <a:solidFill>
+                  <a:srgbClr val="660033"/>
+                </a:solidFill>
+              </a:rPr>
+              <a:t>( 2 / 5 )</a:t>
+            </a:r>
+            <a:endParaRPr lang="vi-VN" sz="2800" b="1" dirty="0">
               <a:solidFill>
                 <a:srgbClr val="660033"/>
               </a:solidFill>
@@ -6523,7 +6185,7 @@
         <p:spPr>
           <a:xfrm>
             <a:off x="0" y="3795887"/>
-            <a:ext cx="9144000" cy="646331"/>
+            <a:ext cx="9144000" cy="523220"/>
           </a:xfrm>
           <a:prstGeom prst="rect">
             <a:avLst/>
@@ -6538,30 +6200,14 @@
           <a:p>
             <a:pPr algn="ctr"/>
             <a:r>
-              <a:rPr lang="en-US" sz="3600" b="1" dirty="0">
-                <a:solidFill>
-                  <a:srgbClr val="660033"/>
-                </a:solidFill>
-              </a:rPr>
-              <a:t>( </a:t>
-            </a:r>
-            <a:r>
-              <a:rPr lang="en-US" sz="3600" b="1" dirty="0" smtClean="0">
-                <a:solidFill>
-                  <a:srgbClr val="660033"/>
-                </a:solidFill>
-              </a:rPr>
-              <a:t>2 </a:t>
-            </a:r>
-            <a:r>
-              <a:rPr lang="en-US" sz="3600" b="1" dirty="0">
-                <a:solidFill>
-                  <a:srgbClr val="660033"/>
-                </a:solidFill>
-              </a:rPr>
-              <a:t>)</a:t>
-            </a:r>
-            <a:endParaRPr lang="vi-VN" sz="3600" b="1" dirty="0">
+              <a:rPr lang="en-US" sz="2800" b="1" dirty="0">
+                <a:solidFill>
+                  <a:srgbClr val="660033"/>
+                </a:solidFill>
+              </a:rPr>
+              <a:t>( 2 / 5 )</a:t>
+            </a:r>
+            <a:endParaRPr lang="vi-VN" sz="2800" b="1" dirty="0">
               <a:solidFill>
                 <a:srgbClr val="660033"/>
               </a:solidFill>
@@ -6683,13 +6329,6 @@
               </a:rPr>
               <a:t>生得享安康</a:t>
             </a:r>
-            <a:endParaRPr lang="zh-TW" altLang="en-US" sz="4800" b="1" dirty="0">
-              <a:solidFill>
-                <a:srgbClr val="660033"/>
-              </a:solidFill>
-              <a:latin typeface="微軟正黑體" pitchFamily="34" charset="-120"/>
-              <a:ea typeface="微軟正黑體" pitchFamily="34" charset="-120"/>
-            </a:endParaRPr>
           </a:p>
         </p:txBody>
       </p:sp>
@@ -6702,7 +6341,7 @@
         <p:spPr>
           <a:xfrm>
             <a:off x="0" y="3795887"/>
-            <a:ext cx="9144000" cy="646331"/>
+            <a:ext cx="9144000" cy="523220"/>
           </a:xfrm>
           <a:prstGeom prst="rect">
             <a:avLst/>
@@ -6717,30 +6356,14 @@
           <a:p>
             <a:pPr algn="ctr"/>
             <a:r>
-              <a:rPr lang="en-US" sz="3600" b="1" dirty="0">
-                <a:solidFill>
-                  <a:srgbClr val="660033"/>
-                </a:solidFill>
-              </a:rPr>
-              <a:t>( </a:t>
-            </a:r>
-            <a:r>
-              <a:rPr lang="en-US" sz="3600" b="1" dirty="0" smtClean="0">
-                <a:solidFill>
-                  <a:srgbClr val="660033"/>
-                </a:solidFill>
-              </a:rPr>
-              <a:t>2 </a:t>
-            </a:r>
-            <a:r>
-              <a:rPr lang="en-US" sz="3600" b="1" dirty="0">
-                <a:solidFill>
-                  <a:srgbClr val="660033"/>
-                </a:solidFill>
-              </a:rPr>
-              <a:t>)</a:t>
-            </a:r>
-            <a:endParaRPr lang="vi-VN" sz="3600" b="1" dirty="0">
+              <a:rPr lang="en-US" sz="2800" b="1" dirty="0">
+                <a:solidFill>
+                  <a:srgbClr val="660033"/>
+                </a:solidFill>
+              </a:rPr>
+              <a:t>( 2 / 5 )</a:t>
+            </a:r>
+            <a:endParaRPr lang="vi-VN" sz="2800" b="1" dirty="0">
               <a:solidFill>
                 <a:srgbClr val="660033"/>
               </a:solidFill>
